--- a/dataset/guides_final/ACC/manual/IT-ACC-001-M_사내 SSO 로그인 오류 처리 매뉴얼.pptx
+++ b/dataset/guides_final/ACC/manual/IT-ACC-001-M_사내 SSO 로그인 오류 처리 매뉴얼.pptx
@@ -41134,7 +41134,7 @@
                 <a:ea typeface="Malgun Gothic"/>
                 <a:cs typeface="Malgun Gothic"/>
               </a:rPr>
-              <a:t>티켓: 콘솔 작업(반복 잠김 분석, 사용 중지·장기 휴면 처리)이 필요한 건. RDY → IP → FIN → CLS 으로 관리한다.</a:t>
+              <a:t>티켓: 콘솔 작업(반복 잠김 분석, 사용 중지·장기 휴면 처리)이 필요한 건. RDY → WIP → FIN → CLS 으로 관리한다.</a:t>
             </a:r>
           </a:p>
         </p:txBody>

--- a/dataset/guides_final/ACC/manual/IT-ACC-001-M_사내 SSO 로그인 오류 처리 매뉴얼.pptx
+++ b/dataset/guides_final/ACC/manual/IT-ACC-001-M_사내 SSO 로그인 오류 처리 매뉴얼.pptx
@@ -3245,7 +3245,7 @@
                 <a:ea typeface="Malgun Gothic"/>
                 <a:cs typeface="Malgun Gothic"/>
               </a:rPr>
-              <a:t>한화시스템 ICT IT 담당자 매뉴얼 · 계정·로그인</a:t>
+              <a:t>가상 ICT 기업 IT 담당자 매뉴얼 · 계정·로그인</a:t>
             </a:r>
           </a:p>
         </p:txBody>
@@ -3524,7 +3524,7 @@
                 <a:ea typeface="Malgun Gothic"/>
                 <a:cs typeface="Malgun Gothic"/>
               </a:rPr>
-              <a:t>© HANWHA SYSTEMS ICT · IT-ACC-001-M · 사내 제한</a:t>
+              <a:t>© 가상 ICT 기업 · IT-ACC-001-M · 사내 제한</a:t>
             </a:r>
           </a:p>
         </p:txBody>
@@ -3969,7 +3969,7 @@
                 <a:ea typeface="Malgun Gothic"/>
                 <a:cs typeface="Malgun Gothic"/>
               </a:rPr>
-              <a:t>© HANWHA SYSTEMS ICT · IT-ACC-001-M · 사내 제한</a:t>
+              <a:t>© 가상 ICT 기업 · IT-ACC-001-M · 사내 제한</a:t>
             </a:r>
           </a:p>
         </p:txBody>
@@ -4217,7 +4217,7 @@
                 <a:ea typeface="Malgun Gothic"/>
                 <a:cs typeface="Malgun Gothic"/>
               </a:rPr>
-              <a:t>© HANWHA SYSTEMS ICT · IT-ACC-001-M · 사내 제한</a:t>
+              <a:t>© 가상 ICT 기업 · IT-ACC-001-M · 사내 제한</a:t>
             </a:r>
           </a:p>
         </p:txBody>
@@ -6843,7 +6843,7 @@
                 <a:ea typeface="Malgun Gothic"/>
                 <a:cs typeface="Malgun Gothic"/>
               </a:rPr>
-              <a:t>© HANWHA SYSTEMS ICT · IT-ACC-001-M · 사내 제한</a:t>
+              <a:t>© 가상 ICT 기업 · IT-ACC-001-M · 사내 제한</a:t>
             </a:r>
           </a:p>
         </p:txBody>
@@ -7768,7 +7768,7 @@
                 <a:ea typeface="Malgun Gothic"/>
                 <a:cs typeface="Malgun Gothic"/>
               </a:rPr>
-              <a:t>© HANWHA SYSTEMS ICT · IT-ACC-001-M · 사내 제한</a:t>
+              <a:t>© 가상 ICT 기업 · IT-ACC-001-M · 사내 제한</a:t>
             </a:r>
           </a:p>
         </p:txBody>
@@ -9980,7 +9980,7 @@
                 <a:ea typeface="Malgun Gothic"/>
                 <a:cs typeface="Malgun Gothic"/>
               </a:rPr>
-              <a:t>© HANWHA SYSTEMS ICT · IT-ACC-001-M · 사내 제한</a:t>
+              <a:t>© 가상 ICT 기업 · IT-ACC-001-M · 사내 제한</a:t>
             </a:r>
           </a:p>
         </p:txBody>
@@ -11148,7 +11148,7 @@
                 <a:ea typeface="Malgun Gothic"/>
                 <a:cs typeface="Malgun Gothic"/>
               </a:rPr>
-              <a:t>© HANWHA SYSTEMS ICT · IT-ACC-001-M · 사내 제한</a:t>
+              <a:t>© 가상 ICT 기업 · IT-ACC-001-M · 사내 제한</a:t>
             </a:r>
           </a:p>
         </p:txBody>
@@ -12191,7 +12191,7 @@
                 <a:ea typeface="Malgun Gothic"/>
                 <a:cs typeface="Malgun Gothic"/>
               </a:rPr>
-              <a:t>© HANWHA SYSTEMS ICT · IT-ACC-001-M · 사내 제한</a:t>
+              <a:t>© 가상 ICT 기업 · IT-ACC-001-M · 사내 제한</a:t>
             </a:r>
           </a:p>
         </p:txBody>
@@ -14427,7 +14427,7 @@
                 <a:ea typeface="Malgun Gothic"/>
                 <a:cs typeface="Malgun Gothic"/>
               </a:rPr>
-              <a:t>© HANWHA SYSTEMS ICT · IT-ACC-001-M · 사내 제한</a:t>
+              <a:t>© 가상 ICT 기업 · IT-ACC-001-M · 사내 제한</a:t>
             </a:r>
           </a:p>
         </p:txBody>
@@ -15619,7 +15619,7 @@
                 <a:ea typeface="Malgun Gothic"/>
                 <a:cs typeface="Malgun Gothic"/>
               </a:rPr>
-              <a:t>© HANWHA SYSTEMS ICT · IT-ACC-001-M · 사내 제한</a:t>
+              <a:t>© 가상 ICT 기업 · IT-ACC-001-M · 사내 제한</a:t>
             </a:r>
           </a:p>
         </p:txBody>
@@ -16870,7 +16870,7 @@
                 <a:ea typeface="Malgun Gothic"/>
                 <a:cs typeface="Malgun Gothic"/>
               </a:rPr>
-              <a:t>© HANWHA SYSTEMS ICT · IT-ACC-001-M · 사내 제한</a:t>
+              <a:t>© 가상 ICT 기업 · IT-ACC-001-M · 사내 제한</a:t>
             </a:r>
           </a:p>
         </p:txBody>
@@ -18513,7 +18513,7 @@
                 <a:ea typeface="Malgun Gothic"/>
                 <a:cs typeface="Malgun Gothic"/>
               </a:rPr>
-              <a:t>© HANWHA SYSTEMS ICT · IT-ACC-001-M · 사내 제한</a:t>
+              <a:t>© 가상 ICT 기업 · IT-ACC-001-M · 사내 제한</a:t>
             </a:r>
           </a:p>
         </p:txBody>
@@ -21146,7 +21146,7 @@
                 <a:ea typeface="Malgun Gothic"/>
                 <a:cs typeface="Malgun Gothic"/>
               </a:rPr>
-              <a:t>© HANWHA SYSTEMS ICT · IT-ACC-001-M · 사내 제한</a:t>
+              <a:t>© 가상 ICT 기업 · IT-ACC-001-M · 사내 제한</a:t>
             </a:r>
           </a:p>
         </p:txBody>
@@ -22439,7 +22439,7 @@
                 <a:ea typeface="Malgun Gothic"/>
                 <a:cs typeface="Malgun Gothic"/>
               </a:rPr>
-              <a:t>© HANWHA SYSTEMS ICT · IT-ACC-001-M · 사내 제한</a:t>
+              <a:t>© 가상 ICT 기업 · IT-ACC-001-M · 사내 제한</a:t>
             </a:r>
           </a:p>
         </p:txBody>
@@ -25207,7 +25207,7 @@
                 <a:ea typeface="Malgun Gothic"/>
                 <a:cs typeface="Malgun Gothic"/>
               </a:rPr>
-              <a:t>© HANWHA SYSTEMS ICT · IT-ACC-001-M · 사내 제한</a:t>
+              <a:t>© 가상 ICT 기업 · IT-ACC-001-M · 사내 제한</a:t>
             </a:r>
           </a:p>
         </p:txBody>
@@ -26226,7 +26226,7 @@
                 <a:ea typeface="Malgun Gothic"/>
                 <a:cs typeface="Malgun Gothic"/>
               </a:rPr>
-              <a:t>© HANWHA SYSTEMS ICT · IT-ACC-001-M · 사내 제한</a:t>
+              <a:t>© 가상 ICT 기업 · IT-ACC-001-M · 사내 제한</a:t>
             </a:r>
           </a:p>
         </p:txBody>
@@ -28806,7 +28806,7 @@
                 <a:ea typeface="Malgun Gothic"/>
                 <a:cs typeface="Malgun Gothic"/>
               </a:rPr>
-              <a:t>© HANWHA SYSTEMS ICT · IT-ACC-001-M · 사내 제한</a:t>
+              <a:t>© 가상 ICT 기업 · IT-ACC-001-M · 사내 제한</a:t>
             </a:r>
           </a:p>
         </p:txBody>
@@ -29731,7 +29731,7 @@
                 <a:ea typeface="Malgun Gothic"/>
                 <a:cs typeface="Malgun Gothic"/>
               </a:rPr>
-              <a:t>© HANWHA SYSTEMS ICT · IT-ACC-001-M · 사내 제한</a:t>
+              <a:t>© 가상 ICT 기업 · IT-ACC-001-M · 사내 제한</a:t>
             </a:r>
           </a:p>
         </p:txBody>
@@ -29979,7 +29979,7 @@
                 <a:ea typeface="Malgun Gothic"/>
                 <a:cs typeface="Malgun Gothic"/>
               </a:rPr>
-              <a:t>© HANWHA SYSTEMS ICT · IT-ACC-001-M · 사내 제한</a:t>
+              <a:t>© 가상 ICT 기업 · IT-ACC-001-M · 사내 제한</a:t>
             </a:r>
           </a:p>
         </p:txBody>
@@ -30894,7 +30894,7 @@
                 <a:ea typeface="Malgun Gothic"/>
                 <a:cs typeface="Malgun Gothic"/>
               </a:rPr>
-              <a:t>© HANWHA SYSTEMS ICT · IT-ACC-001-M · 사내 제한</a:t>
+              <a:t>© 가상 ICT 기업 · IT-ACC-001-M · 사내 제한</a:t>
             </a:r>
           </a:p>
         </p:txBody>
@@ -31142,7 +31142,7 @@
                 <a:ea typeface="Malgun Gothic"/>
                 <a:cs typeface="Malgun Gothic"/>
               </a:rPr>
-              <a:t>© HANWHA SYSTEMS ICT · IT-ACC-001-M · 사내 제한</a:t>
+              <a:t>© 가상 ICT 기업 · IT-ACC-001-M · 사내 제한</a:t>
             </a:r>
           </a:p>
         </p:txBody>
@@ -32282,7 +32282,7 @@
                 <a:ea typeface="Malgun Gothic"/>
                 <a:cs typeface="Malgun Gothic"/>
               </a:rPr>
-              <a:t>© HANWHA SYSTEMS ICT · IT-ACC-001-M · 사내 제한</a:t>
+              <a:t>© 가상 ICT 기업 · IT-ACC-001-M · 사내 제한</a:t>
             </a:r>
           </a:p>
         </p:txBody>
@@ -33428,7 +33428,7 @@
                 <a:ea typeface="Malgun Gothic"/>
                 <a:cs typeface="Malgun Gothic"/>
               </a:rPr>
-              <a:t>© HANWHA SYSTEMS ICT · IT-ACC-001-M · 사내 제한</a:t>
+              <a:t>© 가상 ICT 기업 · IT-ACC-001-M · 사내 제한</a:t>
             </a:r>
           </a:p>
         </p:txBody>
@@ -33676,7 +33676,7 @@
                 <a:ea typeface="Malgun Gothic"/>
                 <a:cs typeface="Malgun Gothic"/>
               </a:rPr>
-              <a:t>© HANWHA SYSTEMS ICT · IT-ACC-001-M · 사내 제한</a:t>
+              <a:t>© 가상 ICT 기업 · IT-ACC-001-M · 사내 제한</a:t>
             </a:r>
           </a:p>
         </p:txBody>
@@ -34988,7 +34988,7 @@
                 <a:ea typeface="Malgun Gothic"/>
                 <a:cs typeface="Malgun Gothic"/>
               </a:rPr>
-              <a:t>© HANWHA SYSTEMS ICT · IT-ACC-001-M · 사내 제한</a:t>
+              <a:t>© 가상 ICT 기업 · IT-ACC-001-M · 사내 제한</a:t>
             </a:r>
           </a:p>
         </p:txBody>
@@ -36386,7 +36386,7 @@
                 <a:ea typeface="Malgun Gothic"/>
                 <a:cs typeface="Malgun Gothic"/>
               </a:rPr>
-              <a:t>© HANWHA SYSTEMS ICT · IT-ACC-001-M · 사내 제한</a:t>
+              <a:t>© 가상 ICT 기업 · IT-ACC-001-M · 사내 제한</a:t>
             </a:r>
           </a:p>
         </p:txBody>
@@ -36634,7 +36634,7 @@
                 <a:ea typeface="Malgun Gothic"/>
                 <a:cs typeface="Malgun Gothic"/>
               </a:rPr>
-              <a:t>© HANWHA SYSTEMS ICT · IT-ACC-001-M · 사내 제한</a:t>
+              <a:t>© 가상 ICT 기업 · IT-ACC-001-M · 사내 제한</a:t>
             </a:r>
           </a:p>
         </p:txBody>
@@ -37556,7 +37556,7 @@
                 <a:ea typeface="Malgun Gothic"/>
                 <a:cs typeface="Malgun Gothic"/>
               </a:rPr>
-              <a:t>© HANWHA SYSTEMS ICT · IT-ACC-001-M · 사내 제한</a:t>
+              <a:t>© 가상 ICT 기업 · IT-ACC-001-M · 사내 제한</a:t>
             </a:r>
           </a:p>
         </p:txBody>
@@ -37804,7 +37804,7 @@
                 <a:ea typeface="Malgun Gothic"/>
                 <a:cs typeface="Malgun Gothic"/>
               </a:rPr>
-              <a:t>© HANWHA SYSTEMS ICT · IT-ACC-001-M · 사내 제한</a:t>
+              <a:t>© 가상 ICT 기업 · IT-ACC-001-M · 사내 제한</a:t>
             </a:r>
           </a:p>
         </p:txBody>
@@ -41275,7 +41275,7 @@
                 <a:ea typeface="Malgun Gothic"/>
                 <a:cs typeface="Malgun Gothic"/>
               </a:rPr>
-              <a:t>© HANWHA SYSTEMS ICT · IT-ACC-001-M · 사내 제한</a:t>
+              <a:t>© 가상 ICT 기업 · IT-ACC-001-M · 사내 제한</a:t>
             </a:r>
           </a:p>
         </p:txBody>
@@ -42771,7 +42771,7 @@
                 <a:ea typeface="Malgun Gothic"/>
                 <a:cs typeface="Malgun Gothic"/>
               </a:rPr>
-              <a:t>© HANWHA SYSTEMS ICT · IT-ACC-001-M · 사내 제한</a:t>
+              <a:t>© 가상 ICT 기업 · IT-ACC-001-M · 사내 제한</a:t>
             </a:r>
           </a:p>
         </p:txBody>
@@ -44932,7 +44932,7 @@
                 <a:ea typeface="Malgun Gothic"/>
                 <a:cs typeface="Malgun Gothic"/>
               </a:rPr>
-              <a:t>© HANWHA SYSTEMS ICT · IT-ACC-001-M · 사내 제한</a:t>
+              <a:t>© 가상 ICT 기업 · IT-ACC-001-M · 사내 제한</a:t>
             </a:r>
           </a:p>
         </p:txBody>
